--- a/Bloc2_Steam.pptx
+++ b/Bloc2_Steam.pptx
@@ -19124,7 +19124,7 @@
             <a:p>
               <a:r>
                 <a:rPr lang="fr-FR" b="1" dirty="0"/>
-                <a:t>56 691</a:t>
+                <a:t>55 691</a:t>
               </a:r>
             </a:p>
           </p:txBody>
